--- a/assets/ppts/M3.5_Ethernet_Protocols_IEEE_802.3.pptx
+++ b/assets/ppts/M3.5_Ethernet_Protocols_IEEE_802.3.pptx
@@ -8,6 +8,7 @@
     <p:sldId id="256" r:id="rId7"/>
     <p:sldId id="257" r:id="rId8"/>
     <p:sldId id="258" r:id="rId9"/>
+    <p:sldId id="259" r:id="rId10"/>
   </p:sldIdLst>
   <p:sldSz cx="12191695" cy="6858000" type="screen4x3"/>
   <p:notesSz cx="6858000" cy="9144000"/>
@@ -3141,8 +3142,8 @@
         </p:nvSpPr>
         <p:spPr>
           <a:xfrm>
-            <a:off x="822960" y="1188720"/>
-            <a:ext cx="164592" cy="4480560"/>
+            <a:off x="0" y="0"/>
+            <a:ext cx="12191695" cy="137160"/>
           </a:xfrm>
           <a:prstGeom prst="rect">
             <a:avLst/>
@@ -3178,14 +3179,57 @@
       </p:sp>
       <p:sp>
         <p:nvSpPr>
-          <p:cNvPr id="4" name="TextBox 3"/>
+          <p:cNvPr id="4" name="Rectangle 3"/>
+          <p:cNvSpPr/>
+          <p:nvPr/>
+        </p:nvSpPr>
+        <p:spPr>
+          <a:xfrm>
+            <a:off x="822960" y="1097280"/>
+            <a:ext cx="164592" cy="4663440"/>
+          </a:xfrm>
+          <a:prstGeom prst="rect">
+            <a:avLst/>
+          </a:prstGeom>
+          <a:solidFill>
+            <a:srgbClr val="D97706"/>
+          </a:solidFill>
+          <a:ln>
+            <a:noFill/>
+          </a:ln>
+        </p:spPr>
+        <p:style>
+          <a:lnRef idx="1">
+            <a:schemeClr val="accent1"/>
+          </a:lnRef>
+          <a:fillRef idx="3">
+            <a:schemeClr val="accent1"/>
+          </a:fillRef>
+          <a:effectRef idx="2">
+            <a:schemeClr val="accent1"/>
+          </a:effectRef>
+          <a:fontRef idx="minor">
+            <a:schemeClr val="lt1"/>
+          </a:fontRef>
+        </p:style>
+        <p:txBody>
+          <a:bodyPr rtlCol="0" anchor="ctr"/>
+          <a:lstStyle/>
+          <a:p>
+            <a:pPr algn="ctr"/>
+          </a:p>
+        </p:txBody>
+      </p:sp>
+      <p:sp>
+        <p:nvSpPr>
+          <p:cNvPr id="5" name="TextBox 4"/>
           <p:cNvSpPr txBox="1"/>
           <p:nvPr/>
         </p:nvSpPr>
         <p:spPr>
           <a:xfrm>
-            <a:off x="1280160" y="1097280"/>
-            <a:ext cx="10058400" cy="4663440"/>
+            <a:off x="1234440" y="1005840"/>
+            <a:ext cx="10241280" cy="4846320"/>
           </a:xfrm>
           <a:prstGeom prst="rect">
             <a:avLst/>
@@ -3200,70 +3244,165 @@
           <a:p>
             <a:pPr>
               <a:spcAft>
+                <a:spcPts val="1000"/>
+              </a:spcAft>
+              <a:defRPr b="1" sz="1300">
+                <a:solidFill>
+                  <a:srgbClr val="D97706"/>
+                </a:solidFill>
+              </a:defRPr>
+            </a:pPr>
+            <a:r>
+              <a:t>PCCST501 Computer Networks | KTU 2024 Scheme • MODULE 3 • M3.5</a:t>
+            </a:r>
+          </a:p>
+          <a:p>
+            <a:pPr>
+              <a:spcAft>
                 <a:spcPts val="1200"/>
               </a:spcAft>
-              <a:defRPr b="1" sz="1300">
-                <a:solidFill>
-                  <a:srgbClr val="D97706"/>
+              <a:defRPr b="1" sz="3000">
+                <a:solidFill>
+                  <a:srgbClr val="F8FAFC"/>
                 </a:solidFill>
               </a:defRPr>
             </a:pPr>
             <a:r>
-              <a:t>PCCST501 Computer Networks | KTU 2024 Scheme • MODULE 3 • M3.5</a:t>
+              <a:t>Ethernet Protocols &amp; IEEE 802.3 Architecture</a:t>
             </a:r>
           </a:p>
           <a:p>
             <a:pPr>
               <a:spcAft>
-                <a:spcPts val="1400"/>
+                <a:spcPts val="2400"/>
               </a:spcAft>
-              <a:defRPr b="1" sz="3200">
-                <a:solidFill>
-                  <a:srgbClr val="F8FAFC"/>
+              <a:defRPr sz="1600">
+                <a:solidFill>
+                  <a:srgbClr val="94A3B8"/>
                 </a:solidFill>
               </a:defRPr>
             </a:pPr>
             <a:r>
-              <a:t>Ethernet Protocols (IEEE 802.3)</a:t>
+              <a:t>Standard Ethernet (10M), Fast Ethernet (100M), Gigabit Ethernet (1G), 10GbE, IEEE 802.3 Frame Format (64B to 1518B)</a:t>
             </a:r>
           </a:p>
           <a:p>
             <a:pPr>
               <a:spcAft>
-                <a:spcPts val="2800"/>
+                <a:spcPts val="300"/>
               </a:spcAft>
-              <a:defRPr sz="1700">
+              <a:defRPr b="1" sz="1350">
+                <a:solidFill>
+                  <a:srgbClr val="E2E8F0"/>
+                </a:solidFill>
+              </a:defRPr>
+            </a:pPr>
+            <a:r>
+              <a:t>Prepared by: Prof. Anju Markose | Assistant Professor, Dept. of CSE | VJCET</a:t>
+            </a:r>
+          </a:p>
+          <a:p>
+            <a:pPr>
+              <a:defRPr sz="1150">
                 <a:solidFill>
                   <a:srgbClr val="94A3B8"/>
                 </a:solidFill>
               </a:defRPr>
             </a:pPr>
             <a:r>
-              <a:t>Standard Ethernet (10BASE-T), Fast Ethernet, Gigabit Ethernet, 10GbE, Frame Format &amp; MTU</a:t>
-            </a:r>
-          </a:p>
+              <a:t>Viswajyothi College of Engineering and Technology (VJCET), Vazhakulam • KTU S5 CSE</a:t>
+            </a:r>
+          </a:p>
+        </p:txBody>
+      </p:sp>
+      <p:sp>
+        <p:nvSpPr>
+          <p:cNvPr id="6" name="Rounded Rectangle 5"/>
+          <p:cNvSpPr/>
+          <p:nvPr/>
+        </p:nvSpPr>
+        <p:spPr>
+          <a:xfrm>
+            <a:off x="8412480" y="5120640"/>
+            <a:ext cx="3017520" cy="822960"/>
+          </a:xfrm>
+          <a:prstGeom prst="roundRect">
+            <a:avLst/>
+          </a:prstGeom>
+          <a:solidFill>
+            <a:srgbClr val="1E293B"/>
+          </a:solidFill>
+          <a:ln w="12700">
+            <a:solidFill>
+              <a:srgbClr val="0E7490"/>
+            </a:solidFill>
+          </a:ln>
+        </p:spPr>
+        <p:style>
+          <a:lnRef idx="1">
+            <a:schemeClr val="accent1"/>
+          </a:lnRef>
+          <a:fillRef idx="3">
+            <a:schemeClr val="accent1"/>
+          </a:fillRef>
+          <a:effectRef idx="2">
+            <a:schemeClr val="accent1"/>
+          </a:effectRef>
+          <a:fontRef idx="minor">
+            <a:schemeClr val="lt1"/>
+          </a:fontRef>
+        </p:style>
+        <p:txBody>
+          <a:bodyPr rtlCol="0" anchor="ctr"/>
+          <a:lstStyle/>
+          <a:p>
+            <a:pPr algn="ctr"/>
+          </a:p>
+        </p:txBody>
+      </p:sp>
+      <p:sp>
+        <p:nvSpPr>
+          <p:cNvPr id="7" name="TextBox 6"/>
+          <p:cNvSpPr txBox="1"/>
+          <p:nvPr/>
+        </p:nvSpPr>
+        <p:spPr>
+          <a:xfrm>
+            <a:off x="8503920" y="5166360"/>
+            <a:ext cx="2834640" cy="731520"/>
+          </a:xfrm>
+          <a:prstGeom prst="rect">
+            <a:avLst/>
+          </a:prstGeom>
+          <a:noFill/>
+        </p:spPr>
+        <p:txBody>
+          <a:bodyPr wrap="none">
+            <a:spAutoFit/>
+          </a:bodyPr>
+          <a:lstStyle/>
           <a:p>
             <a:pPr>
-              <a:defRPr b="1" sz="1300">
-                <a:solidFill>
-                  <a:srgbClr val="E2E8F0"/>
+              <a:defRPr b="1" sz="1050">
+                <a:solidFill>
+                  <a:srgbClr val="D97706"/>
                 </a:solidFill>
               </a:defRPr>
             </a:pPr>
             <a:r>
-              <a:t>Prepared by: Prof. Anju Markose | Assistant Professor, Dept. of CSE | VJCET</a:t>
+              <a:t>KTU B.Tech Curriculum</a:t>
             </a:r>
           </a:p>
           <a:p>
             <a:pPr>
-              <a:defRPr sz="1100">
-                <a:solidFill>
-                  <a:srgbClr val="94A3B8"/>
+              <a:defRPr sz="950">
+                <a:solidFill>
+                  <a:srgbClr val="F8FAFC"/>
                 </a:solidFill>
               </a:defRPr>
             </a:pPr>
             <a:r>
-              <a:t>Viswajyothi College of Engineering and Technology (VJCET), Vazhakulam</a:t>
+              <a:t>Official Classroom Slide Deck</a:t>
             </a:r>
           </a:p>
         </p:txBody>
@@ -3395,7 +3534,7 @@
           <a:lstStyle/>
           <a:p>
             <a:pPr>
-              <a:defRPr b="1" sz="2300">
+              <a:defRPr b="1" sz="2200">
                 <a:solidFill>
                   <a:srgbClr val="F8FAFC"/>
                 </a:solidFill>
@@ -3450,7 +3589,7 @@
         </p:nvSpPr>
         <p:spPr>
           <a:xfrm>
-            <a:off x="731520" y="1280160"/>
+            <a:off x="731520" y="1234440"/>
             <a:ext cx="6858000" cy="4937760"/>
           </a:xfrm>
           <a:prstGeom prst="rect">
@@ -3468,7 +3607,7 @@
               <a:spcAft>
                 <a:spcPts val="200"/>
               </a:spcAft>
-              <a:defRPr b="1" sz="1500">
+              <a:defRPr b="1" sz="1450">
                 <a:solidFill>
                   <a:srgbClr val="0F1E4A"/>
                 </a:solidFill>
@@ -3481,16 +3620,16 @@
           <a:p>
             <a:pPr>
               <a:spcAft>
-                <a:spcPts val="800"/>
+                <a:spcPts val="700"/>
               </a:spcAft>
-              <a:defRPr sz="1300">
-                <a:solidFill>
-                  <a:srgbClr val="1E293B"/>
+              <a:defRPr sz="1250">
+                <a:solidFill>
+                  <a:srgbClr val="0F172A"/>
                 </a:solidFill>
               </a:defRPr>
             </a:pPr>
             <a:r>
-              <a:t>   Alternating `10101010` pattern for receiver clock synchronization.</a:t>
+              <a:t>   7 bytes of alternating `10101010` patterns used to synchronize receiver clock circuitry.</a:t>
             </a:r>
           </a:p>
           <a:p>
@@ -3498,29 +3637,29 @@
               <a:spcAft>
                 <a:spcPts val="200"/>
               </a:spcAft>
-              <a:defRPr b="1" sz="1500">
+              <a:defRPr b="1" sz="1450">
                 <a:solidFill>
                   <a:srgbClr val="0F1E4A"/>
                 </a:solidFill>
               </a:defRPr>
             </a:pPr>
             <a:r>
-              <a:t>• Start of Frame Delimiter (SFD - 1 Byte)</a:t>
+              <a:t>• Start of Frame Delimiter - SFD (1 Byte)</a:t>
             </a:r>
           </a:p>
           <a:p>
             <a:pPr>
               <a:spcAft>
-                <a:spcPts val="800"/>
+                <a:spcPts val="700"/>
               </a:spcAft>
-              <a:defRPr sz="1300">
-                <a:solidFill>
-                  <a:srgbClr val="1E293B"/>
+              <a:defRPr sz="1250">
+                <a:solidFill>
+                  <a:srgbClr val="0F172A"/>
                 </a:solidFill>
               </a:defRPr>
             </a:pPr>
             <a:r>
-              <a:t>   `10101011` pattern signaling start of valid frame data.</a:t>
+              <a:t>   1 byte pattern `10101011` indicating that destination MAC address begins immediately on the next bit.</a:t>
             </a:r>
           </a:p>
           <a:p>
@@ -3528,29 +3667,29 @@
               <a:spcAft>
                 <a:spcPts val="200"/>
               </a:spcAft>
-              <a:defRPr b="1" sz="1500">
+              <a:defRPr b="1" sz="1450">
                 <a:solidFill>
                   <a:srgbClr val="0F1E4A"/>
                 </a:solidFill>
               </a:defRPr>
             </a:pPr>
             <a:r>
-              <a:t>• Destination MAC (6 Bytes) &amp; Source MAC (6 Bytes)</a:t>
+              <a:t>• Destination MAC Address (6 Bytes)</a:t>
             </a:r>
           </a:p>
           <a:p>
             <a:pPr>
               <a:spcAft>
-                <a:spcPts val="800"/>
+                <a:spcPts val="700"/>
               </a:spcAft>
-              <a:defRPr sz="1300">
-                <a:solidFill>
-                  <a:srgbClr val="1E293B"/>
+              <a:defRPr sz="1250">
+                <a:solidFill>
+                  <a:srgbClr val="0F172A"/>
                 </a:solidFill>
               </a:defRPr>
             </a:pPr>
             <a:r>
-              <a:t>   48-bit physical hardware addresses of receiver and sender.</a:t>
+              <a:t>   48-bit hardware address of target NIC (or broadcast `FF:FF:FF:FF:FF:FF`).</a:t>
             </a:r>
           </a:p>
           <a:p>
@@ -3558,29 +3697,29 @@
               <a:spcAft>
                 <a:spcPts val="200"/>
               </a:spcAft>
-              <a:defRPr b="1" sz="1500">
+              <a:defRPr b="1" sz="1450">
                 <a:solidFill>
                   <a:srgbClr val="0F1E4A"/>
                 </a:solidFill>
               </a:defRPr>
             </a:pPr>
             <a:r>
-              <a:t>• Type / Length Field (2 Bytes)</a:t>
+              <a:t>• Source MAC Address (6 Bytes)</a:t>
             </a:r>
           </a:p>
           <a:p>
             <a:pPr>
               <a:spcAft>
-                <a:spcPts val="800"/>
+                <a:spcPts val="700"/>
               </a:spcAft>
-              <a:defRPr sz="1300">
-                <a:solidFill>
-                  <a:srgbClr val="1E293B"/>
+              <a:defRPr sz="1250">
+                <a:solidFill>
+                  <a:srgbClr val="0F172A"/>
                 </a:solidFill>
               </a:defRPr>
             </a:pPr>
             <a:r>
-              <a:t>   If $\ge 1536$ (`0x0600`), specifies upper layer protocol (`0x0800` for IPv4, `0x0806` for ARP). If $\le 1500$, specifies payload byte length.</a:t>
+              <a:t>   48-bit hardware address of sending NIC.</a:t>
             </a:r>
           </a:p>
           <a:p>
@@ -3588,29 +3727,29 @@
               <a:spcAft>
                 <a:spcPts val="200"/>
               </a:spcAft>
-              <a:defRPr b="1" sz="1500">
+              <a:defRPr b="1" sz="1450">
                 <a:solidFill>
                   <a:srgbClr val="0F1E4A"/>
                 </a:solidFill>
               </a:defRPr>
             </a:pPr>
             <a:r>
-              <a:t>• Data Payload (46 to 1500 Bytes)</a:t>
+              <a:t>• Type / Length Field (2 Bytes)</a:t>
             </a:r>
           </a:p>
           <a:p>
             <a:pPr>
               <a:spcAft>
-                <a:spcPts val="800"/>
+                <a:spcPts val="700"/>
               </a:spcAft>
-              <a:defRPr sz="1300">
-                <a:solidFill>
-                  <a:srgbClr val="1E293B"/>
+              <a:defRPr sz="1250">
+                <a:solidFill>
+                  <a:srgbClr val="0F172A"/>
                 </a:solidFill>
               </a:defRPr>
             </a:pPr>
             <a:r>
-              <a:t>   Minimum 46 bytes (padded with zeros if smaller to meet 64B frame minimum) and Maximum 1500 bytes (MTU).</a:t>
+              <a:t>   If $\ge 1536$ (0x0600), specifies upper layer protocol (EtherType: IPv4 `0x0800`, ARP `0x0806`, IPv6 `0x86DD`). If $\le 1500$, specifies frame payload length.</a:t>
             </a:r>
           </a:p>
           <a:p>
@@ -3618,29 +3757,59 @@
               <a:spcAft>
                 <a:spcPts val="200"/>
               </a:spcAft>
-              <a:defRPr b="1" sz="1500">
+              <a:defRPr b="1" sz="1450">
                 <a:solidFill>
                   <a:srgbClr val="0F1E4A"/>
                 </a:solidFill>
               </a:defRPr>
             </a:pPr>
             <a:r>
-              <a:t>• CRC-32 FCS Trailer (4 Bytes)</a:t>
+              <a:t>• Payload / Data (46 to 1500 Bytes)</a:t>
             </a:r>
           </a:p>
           <a:p>
             <a:pPr>
               <a:spcAft>
-                <a:spcPts val="800"/>
+                <a:spcPts val="700"/>
               </a:spcAft>
-              <a:defRPr sz="1300">
-                <a:solidFill>
-                  <a:srgbClr val="1E293B"/>
+              <a:defRPr sz="1250">
+                <a:solidFill>
+                  <a:srgbClr val="0F172A"/>
                 </a:solidFill>
               </a:defRPr>
             </a:pPr>
             <a:r>
-              <a:t>   Cyclic Redundancy Check trailer verifying frame integrity.</a:t>
+              <a:t>   Carries L3 datagram. Minimum payload is 46 bytes (padded with zeros if smaller) to enforce the 64-byte minimum frame size constraint.</a:t>
+            </a:r>
+          </a:p>
+          <a:p>
+            <a:pPr>
+              <a:spcAft>
+                <a:spcPts val="200"/>
+              </a:spcAft>
+              <a:defRPr b="1" sz="1450">
+                <a:solidFill>
+                  <a:srgbClr val="0F1E4A"/>
+                </a:solidFill>
+              </a:defRPr>
+            </a:pPr>
+            <a:r>
+              <a:t>• Frame Check Sequence - FCS (4 Bytes)</a:t>
+            </a:r>
+          </a:p>
+          <a:p>
+            <a:pPr>
+              <a:spcAft>
+                <a:spcPts val="700"/>
+              </a:spcAft>
+              <a:defRPr sz="1250">
+                <a:solidFill>
+                  <a:srgbClr val="0F172A"/>
+                </a:solidFill>
+              </a:defRPr>
+            </a:pPr>
+            <a:r>
+              <a:t>   32-bit Cyclic Redundancy Check (CRC-32) computed over Dst MAC, Src MAC, Type, and Payload.</a:t>
             </a:r>
           </a:p>
         </p:txBody>
@@ -3653,14 +3822,14 @@
         </p:nvSpPr>
         <p:spPr>
           <a:xfrm>
-            <a:off x="7955279" y="1280160"/>
-            <a:ext cx="3566160" cy="4846320"/>
+            <a:off x="7955279" y="1234440"/>
+            <a:ext cx="3566160" cy="4892040"/>
           </a:xfrm>
           <a:prstGeom prst="roundRect">
             <a:avLst/>
           </a:prstGeom>
           <a:solidFill>
-            <a:srgbClr val="F1F5F9"/>
+            <a:srgbClr val="F8FAFC"/>
           </a:solidFill>
           <a:ln w="19050">
             <a:solidFill>
@@ -3698,7 +3867,7 @@
         </p:nvSpPr>
         <p:spPr>
           <a:xfrm>
-            <a:off x="8138160" y="1417320"/>
+            <a:off x="8138160" y="1371600"/>
             <a:ext cx="3200400" cy="4572000"/>
           </a:xfrm>
           <a:prstGeom prst="rect">
@@ -3723,7 +3892,7 @@
               </a:defRPr>
             </a:pPr>
             <a:r>
-              <a:t>Frame Size Limits</a:t>
+              <a:t>Frame Sizes</a:t>
             </a:r>
           </a:p>
           <a:p>
@@ -3733,12 +3902,12 @@
               </a:spcAft>
               <a:defRPr sz="1200">
                 <a:solidFill>
-                  <a:srgbClr val="1E293B"/>
+                  <a:srgbClr val="0F172A"/>
                 </a:solidFill>
               </a:defRPr>
             </a:pPr>
             <a:r>
-              <a:t>→ Min Frame Size: 64 Bytes</a:t>
+              <a:t>→ Preamble + SFD: 8 Bytes</a:t>
             </a:r>
           </a:p>
           <a:p>
@@ -3748,12 +3917,12 @@
               </a:spcAft>
               <a:defRPr sz="1200">
                 <a:solidFill>
-                  <a:srgbClr val="1E293B"/>
+                  <a:srgbClr val="0F172A"/>
                 </a:solidFill>
               </a:defRPr>
             </a:pPr>
             <a:r>
-              <a:t>→ Max Frame Size: 1518 Bytes</a:t>
+              <a:t>→ Header + FCS: 18 Bytes</a:t>
             </a:r>
           </a:p>
           <a:p>
@@ -3763,7 +3932,7 @@
               </a:spcAft>
               <a:defRPr sz="1200">
                 <a:solidFill>
-                  <a:srgbClr val="1E293B"/>
+                  <a:srgbClr val="0F172A"/>
                 </a:solidFill>
               </a:defRPr>
             </a:pPr>
@@ -3778,7 +3947,7 @@
               </a:spcAft>
               <a:defRPr sz="1200">
                 <a:solidFill>
-                  <a:srgbClr val="1E293B"/>
+                  <a:srgbClr val="0F172A"/>
                 </a:solidFill>
               </a:defRPr>
             </a:pPr>
@@ -3793,12 +3962,27 @@
               </a:spcAft>
               <a:defRPr sz="1200">
                 <a:solidFill>
-                  <a:srgbClr val="1E293B"/>
+                  <a:srgbClr val="0F172A"/>
                 </a:solidFill>
               </a:defRPr>
             </a:pPr>
             <a:r>
-              <a:t>→ Preamble + SFD = 8 Bytes</a:t>
+              <a:t>→ Min Frame Size: 64 Bytes</a:t>
+            </a:r>
+          </a:p>
+          <a:p>
+            <a:pPr>
+              <a:spcAft>
+                <a:spcPts val="600"/>
+              </a:spcAft>
+              <a:defRPr sz="1200">
+                <a:solidFill>
+                  <a:srgbClr val="0F172A"/>
+                </a:solidFill>
+              </a:defRPr>
+            </a:pPr>
+            <a:r>
+              <a:t>→ Max Frame Size: 1518 Bytes</a:t>
             </a:r>
           </a:p>
         </p:txBody>
@@ -3811,8 +3995,8 @@
         </p:nvSpPr>
         <p:spPr>
           <a:xfrm>
-            <a:off x="731520" y="6309360"/>
-            <a:ext cx="10789920" cy="365760"/>
+            <a:off x="731520" y="6327648"/>
+            <a:ext cx="10789920" cy="320040"/>
           </a:xfrm>
           <a:prstGeom prst="rect">
             <a:avLst/>
@@ -3834,6 +4018,41 @@
             </a:pPr>
             <a:r>
               <a:t>PCCST501 Computer Networks | KTU 2024 Scheme | Prof. Anju Markose | Assistant Professor, Dept. of CSE | VJCET</a:t>
+            </a:r>
+          </a:p>
+        </p:txBody>
+      </p:sp>
+      <p:sp>
+        <p:nvSpPr>
+          <p:cNvPr id="10" name="TextBox 9"/>
+          <p:cNvSpPr txBox="1"/>
+          <p:nvPr/>
+        </p:nvSpPr>
+        <p:spPr>
+          <a:xfrm>
+            <a:off x="6858000" y="6327648"/>
+            <a:ext cx="4572000" cy="320040"/>
+          </a:xfrm>
+          <a:prstGeom prst="rect">
+            <a:avLst/>
+          </a:prstGeom>
+          <a:noFill/>
+        </p:spPr>
+        <p:txBody>
+          <a:bodyPr wrap="none">
+            <a:spAutoFit/>
+          </a:bodyPr>
+          <a:lstStyle/>
+          <a:p>
+            <a:pPr algn="r">
+              <a:defRPr sz="950">
+                <a:solidFill>
+                  <a:srgbClr val="64748B"/>
+                </a:solidFill>
+              </a:defRPr>
+            </a:pPr>
+            <a:r>
+              <a:t>Dept. of CSE, VJCET</a:t>
             </a:r>
           </a:p>
         </p:txBody>
@@ -3965,14 +4184,14 @@
           <a:lstStyle/>
           <a:p>
             <a:pPr>
-              <a:defRPr b="1" sz="2300">
+              <a:defRPr b="1" sz="2200">
                 <a:solidFill>
                   <a:srgbClr val="F8FAFC"/>
                 </a:solidFill>
               </a:defRPr>
             </a:pPr>
             <a:r>
-              <a:t>3.5.2 High-Speed Ethernet Standards Evolution</a:t>
+              <a:t>3.5.2 Ethernet Speed Evolution: Standard to 10GbE</a:t>
             </a:r>
           </a:p>
         </p:txBody>
@@ -4020,18 +4239,18 @@
         </p:nvSpPr>
         <p:spPr>
           <a:xfrm>
-            <a:off x="731520" y="1280160"/>
-            <a:ext cx="5212080" cy="4846320"/>
+            <a:off x="731520" y="1234440"/>
+            <a:ext cx="5212080" cy="4892040"/>
           </a:xfrm>
           <a:prstGeom prst="roundRect">
             <a:avLst/>
           </a:prstGeom>
           <a:solidFill>
-            <a:srgbClr val="F1F5F9"/>
+            <a:srgbClr val="F8FAFC"/>
           </a:solidFill>
           <a:ln w="19050">
             <a:solidFill>
-              <a:srgbClr val="0E7490"/>
+              <a:srgbClr val="0F1E4A"/>
             </a:solidFill>
           </a:ln>
         </p:spPr>
@@ -4065,7 +4284,7 @@
         </p:nvSpPr>
         <p:spPr>
           <a:xfrm>
-            <a:off x="914400" y="1417320"/>
+            <a:off x="914400" y="1371600"/>
             <a:ext cx="4846320" cy="4572000"/>
           </a:xfrm>
           <a:prstGeom prst="rect">
@@ -4081,9 +4300,9 @@
           <a:p>
             <a:pPr>
               <a:spcAft>
-                <a:spcPts val="1200"/>
+                <a:spcPts val="1000"/>
               </a:spcAft>
-              <a:defRPr b="1" sz="1600">
+              <a:defRPr b="1" sz="1550">
                 <a:solidFill>
                   <a:srgbClr val="0F1E4A"/>
                 </a:solidFill>
@@ -4096,46 +4315,31 @@
           <a:p>
             <a:pPr>
               <a:spcAft>
-                <a:spcPts val="600"/>
+                <a:spcPts val="500"/>
               </a:spcAft>
-              <a:defRPr sz="1250">
-                <a:solidFill>
-                  <a:srgbClr val="1E293B"/>
+              <a:defRPr sz="1200">
+                <a:solidFill>
+                  <a:srgbClr val="0F172A"/>
                 </a:solidFill>
               </a:defRPr>
             </a:pPr>
             <a:r>
-              <a:t>• Standard Ethernet (10BASE-T): 10 Mbps, Cat 3/5 UTP, Manchester encoding, Hub topology, CSMA/CD half-duplex</a:t>
+              <a:t>• Standard (10 Mbps): 10Base5 (Thicknet coaxial), 10Base2 (Thinnet), 10Base-T (UTP Cat 3/5 with Hub/Switch). Uses Manchester line coding</a:t>
             </a:r>
           </a:p>
           <a:p>
             <a:pPr>
               <a:spcAft>
-                <a:spcPts val="600"/>
+                <a:spcPts val="500"/>
               </a:spcAft>
-              <a:defRPr sz="1250">
-                <a:solidFill>
-                  <a:srgbClr val="1E293B"/>
+              <a:defRPr sz="1200">
+                <a:solidFill>
+                  <a:srgbClr val="0F172A"/>
                 </a:solidFill>
               </a:defRPr>
             </a:pPr>
             <a:r>
-              <a:t>• Fast Ethernet (100BASE-TX): 100 Mbps, Cat 5 UTP (2 pairs), 4B/5B + MLT-3 line encoding, Switch full-duplex</a:t>
-            </a:r>
-          </a:p>
-          <a:p>
-            <a:pPr>
-              <a:spcAft>
-                <a:spcPts val="600"/>
-              </a:spcAft>
-              <a:defRPr sz="1250">
-                <a:solidFill>
-                  <a:srgbClr val="1E293B"/>
-                </a:solidFill>
-              </a:defRPr>
-            </a:pPr>
-            <a:r>
-              <a:t>• 100BASE-FX: 100 Mbps over Multi-mode Optical Fiber (2 km reach)</a:t>
+              <a:t>• Fast Ethernet (100 Mbps): 100Base-TX (Cat 5 UTP using 4B/5B and MLT-3 coding), 100Base-FX (Fiber). Introduces Auto-Negotiation</a:t>
             </a:r>
           </a:p>
         </p:txBody>
@@ -4148,8 +4352,8 @@
         </p:nvSpPr>
         <p:spPr>
           <a:xfrm>
-            <a:off x="6309360" y="1280160"/>
-            <a:ext cx="5212080" cy="4846320"/>
+            <a:off x="6309360" y="1234440"/>
+            <a:ext cx="5212080" cy="4892040"/>
           </a:xfrm>
           <a:prstGeom prst="roundRect">
             <a:avLst/>
@@ -4159,7 +4363,7 @@
           </a:solidFill>
           <a:ln w="19050">
             <a:solidFill>
-              <a:srgbClr val="0F1E4A"/>
+              <a:srgbClr val="0E7490"/>
             </a:solidFill>
           </a:ln>
         </p:spPr>
@@ -4193,7 +4397,7 @@
         </p:nvSpPr>
         <p:spPr>
           <a:xfrm>
-            <a:off x="6492240" y="1417320"/>
+            <a:off x="6492240" y="1371600"/>
             <a:ext cx="4846320" cy="4572000"/>
           </a:xfrm>
           <a:prstGeom prst="rect">
@@ -4209,9 +4413,9 @@
           <a:p>
             <a:pPr>
               <a:spcAft>
-                <a:spcPts val="1200"/>
+                <a:spcPts val="1000"/>
               </a:spcAft>
-              <a:defRPr b="1" sz="1600">
+              <a:defRPr b="1" sz="1550">
                 <a:solidFill>
                   <a:srgbClr val="0E7490"/>
                 </a:solidFill>
@@ -4219,6 +4423,476 @@
             </a:pPr>
             <a:r>
               <a:t>Gigabit &amp; 10G Ethernet</a:t>
+            </a:r>
+          </a:p>
+          <a:p>
+            <a:pPr>
+              <a:spcAft>
+                <a:spcPts val="500"/>
+              </a:spcAft>
+              <a:defRPr sz="1200">
+                <a:solidFill>
+                  <a:srgbClr val="0F172A"/>
+                </a:solidFill>
+              </a:defRPr>
+            </a:pPr>
+            <a:r>
+              <a:t>• Gigabit Ethernet (1 Gbps): 1000Base-T (Cat 5e/6 UTP using 4 pairs full-duplex with 8B/10B coding), 1000Base-SX/LX (Fiber). Introduces Carrier Extension and Packet Bursting for half-duplex</a:t>
+            </a:r>
+          </a:p>
+          <a:p>
+            <a:pPr>
+              <a:spcAft>
+                <a:spcPts val="500"/>
+              </a:spcAft>
+              <a:defRPr sz="1200">
+                <a:solidFill>
+                  <a:srgbClr val="0F172A"/>
+                </a:solidFill>
+              </a:defRPr>
+            </a:pPr>
+            <a:r>
+              <a:t>• 10 Gigabit Ethernet (10 Gbps): 10GBase-T (Cat 6a/7) and 10GBase-SR/LR. Exclusively full-duplex switched connections; eliminates CSMA/CD completely</a:t>
+            </a:r>
+          </a:p>
+        </p:txBody>
+      </p:sp>
+      <p:sp>
+        <p:nvSpPr>
+          <p:cNvPr id="10" name="TextBox 9"/>
+          <p:cNvSpPr txBox="1"/>
+          <p:nvPr/>
+        </p:nvSpPr>
+        <p:spPr>
+          <a:xfrm>
+            <a:off x="731520" y="6327648"/>
+            <a:ext cx="10789920" cy="320040"/>
+          </a:xfrm>
+          <a:prstGeom prst="rect">
+            <a:avLst/>
+          </a:prstGeom>
+          <a:noFill/>
+        </p:spPr>
+        <p:txBody>
+          <a:bodyPr wrap="none">
+            <a:spAutoFit/>
+          </a:bodyPr>
+          <a:lstStyle/>
+          <a:p>
+            <a:pPr>
+              <a:defRPr sz="950">
+                <a:solidFill>
+                  <a:srgbClr val="64748B"/>
+                </a:solidFill>
+              </a:defRPr>
+            </a:pPr>
+            <a:r>
+              <a:t>PCCST501 Computer Networks | KTU 2024 Scheme | Prof. Anju Markose | Assistant Professor, Dept. of CSE | VJCET</a:t>
+            </a:r>
+          </a:p>
+        </p:txBody>
+      </p:sp>
+      <p:sp>
+        <p:nvSpPr>
+          <p:cNvPr id="11" name="TextBox 10"/>
+          <p:cNvSpPr txBox="1"/>
+          <p:nvPr/>
+        </p:nvSpPr>
+        <p:spPr>
+          <a:xfrm>
+            <a:off x="6858000" y="6327648"/>
+            <a:ext cx="4572000" cy="320040"/>
+          </a:xfrm>
+          <a:prstGeom prst="rect">
+            <a:avLst/>
+          </a:prstGeom>
+          <a:noFill/>
+        </p:spPr>
+        <p:txBody>
+          <a:bodyPr wrap="none">
+            <a:spAutoFit/>
+          </a:bodyPr>
+          <a:lstStyle/>
+          <a:p>
+            <a:pPr algn="r">
+              <a:defRPr sz="950">
+                <a:solidFill>
+                  <a:srgbClr val="64748B"/>
+                </a:solidFill>
+              </a:defRPr>
+            </a:pPr>
+            <a:r>
+              <a:t>Dept. of CSE, VJCET</a:t>
+            </a:r>
+          </a:p>
+        </p:txBody>
+      </p:sp>
+    </p:spTree>
+  </p:cSld>
+  <p:clrMapOvr>
+    <a:masterClrMapping/>
+  </p:clrMapOvr>
+</p:sld>
+</file>
+
+<file path=ppt/slides/slide4.xml><?xml version="1.0" encoding="utf-8"?>
+<p:sld xmlns:a="http://schemas.openxmlformats.org/drawingml/2006/main" xmlns:p="http://schemas.openxmlformats.org/presentationml/2006/main" xmlns:r="http://schemas.openxmlformats.org/officeDocument/2006/relationships">
+  <p:cSld>
+    <p:spTree>
+      <p:nvGrpSpPr>
+        <p:cNvPr id="1" name=""/>
+        <p:cNvGrpSpPr/>
+        <p:nvPr/>
+      </p:nvGrpSpPr>
+      <p:grpSpPr/>
+      <p:sp>
+        <p:nvSpPr>
+          <p:cNvPr id="2" name="Rectangle 1"/>
+          <p:cNvSpPr/>
+          <p:nvPr/>
+        </p:nvSpPr>
+        <p:spPr>
+          <a:xfrm>
+            <a:off x="0" y="0"/>
+            <a:ext cx="12191695" cy="1005840"/>
+          </a:xfrm>
+          <a:prstGeom prst="rect">
+            <a:avLst/>
+          </a:prstGeom>
+          <a:solidFill>
+            <a:srgbClr val="0F1E4A"/>
+          </a:solidFill>
+          <a:ln>
+            <a:noFill/>
+          </a:ln>
+        </p:spPr>
+        <p:style>
+          <a:lnRef idx="1">
+            <a:schemeClr val="accent1"/>
+          </a:lnRef>
+          <a:fillRef idx="3">
+            <a:schemeClr val="accent1"/>
+          </a:fillRef>
+          <a:effectRef idx="2">
+            <a:schemeClr val="accent1"/>
+          </a:effectRef>
+          <a:fontRef idx="minor">
+            <a:schemeClr val="lt1"/>
+          </a:fontRef>
+        </p:style>
+        <p:txBody>
+          <a:bodyPr rtlCol="0" anchor="ctr"/>
+          <a:lstStyle/>
+          <a:p>
+            <a:pPr algn="ctr"/>
+          </a:p>
+        </p:txBody>
+      </p:sp>
+      <p:sp>
+        <p:nvSpPr>
+          <p:cNvPr id="3" name="Rectangle 2"/>
+          <p:cNvSpPr/>
+          <p:nvPr/>
+        </p:nvSpPr>
+        <p:spPr>
+          <a:xfrm>
+            <a:off x="0" y="969264"/>
+            <a:ext cx="12191695" cy="36576"/>
+          </a:xfrm>
+          <a:prstGeom prst="rect">
+            <a:avLst/>
+          </a:prstGeom>
+          <a:solidFill>
+            <a:srgbClr val="D97706"/>
+          </a:solidFill>
+          <a:ln>
+            <a:noFill/>
+          </a:ln>
+        </p:spPr>
+        <p:style>
+          <a:lnRef idx="1">
+            <a:schemeClr val="accent1"/>
+          </a:lnRef>
+          <a:fillRef idx="3">
+            <a:schemeClr val="accent1"/>
+          </a:fillRef>
+          <a:effectRef idx="2">
+            <a:schemeClr val="accent1"/>
+          </a:effectRef>
+          <a:fontRef idx="minor">
+            <a:schemeClr val="lt1"/>
+          </a:fontRef>
+        </p:style>
+        <p:txBody>
+          <a:bodyPr rtlCol="0" anchor="ctr"/>
+          <a:lstStyle/>
+          <a:p>
+            <a:pPr algn="ctr"/>
+          </a:p>
+        </p:txBody>
+      </p:sp>
+      <p:sp>
+        <p:nvSpPr>
+          <p:cNvPr id="4" name="TextBox 3"/>
+          <p:cNvSpPr txBox="1"/>
+          <p:nvPr/>
+        </p:nvSpPr>
+        <p:spPr>
+          <a:xfrm>
+            <a:off x="731520" y="164592"/>
+            <a:ext cx="8412480" cy="685800"/>
+          </a:xfrm>
+          <a:prstGeom prst="rect">
+            <a:avLst/>
+          </a:prstGeom>
+          <a:noFill/>
+        </p:spPr>
+        <p:txBody>
+          <a:bodyPr wrap="none">
+            <a:spAutoFit/>
+          </a:bodyPr>
+          <a:lstStyle/>
+          <a:p>
+            <a:pPr>
+              <a:defRPr b="1" sz="2100">
+                <a:solidFill>
+                  <a:srgbClr val="F8FAFC"/>
+                </a:solidFill>
+              </a:defRPr>
+            </a:pPr>
+            <a:r>
+              <a:t>🎯 Exam Booster &amp; Review: IEEE 802.3 Ethernet</a:t>
+            </a:r>
+          </a:p>
+        </p:txBody>
+      </p:sp>
+      <p:sp>
+        <p:nvSpPr>
+          <p:cNvPr id="5" name="TextBox 4"/>
+          <p:cNvSpPr txBox="1"/>
+          <p:nvPr/>
+        </p:nvSpPr>
+        <p:spPr>
+          <a:xfrm>
+            <a:off x="8229600" y="164592"/>
+            <a:ext cx="3291840" cy="685800"/>
+          </a:xfrm>
+          <a:prstGeom prst="rect">
+            <a:avLst/>
+          </a:prstGeom>
+          <a:noFill/>
+        </p:spPr>
+        <p:txBody>
+          <a:bodyPr wrap="none">
+            <a:spAutoFit/>
+          </a:bodyPr>
+          <a:lstStyle/>
+          <a:p>
+            <a:pPr algn="r">
+              <a:defRPr b="1" sz="1300">
+                <a:solidFill>
+                  <a:srgbClr val="D97706"/>
+                </a:solidFill>
+              </a:defRPr>
+            </a:pPr>
+            <a:r>
+              <a:t>M3.5</a:t>
+            </a:r>
+          </a:p>
+        </p:txBody>
+      </p:sp>
+      <p:sp>
+        <p:nvSpPr>
+          <p:cNvPr id="6" name="Rounded Rectangle 5"/>
+          <p:cNvSpPr/>
+          <p:nvPr/>
+        </p:nvSpPr>
+        <p:spPr>
+          <a:xfrm>
+            <a:off x="731520" y="1234440"/>
+            <a:ext cx="5303520" cy="4892040"/>
+          </a:xfrm>
+          <a:prstGeom prst="roundRect">
+            <a:avLst/>
+          </a:prstGeom>
+          <a:solidFill>
+            <a:srgbClr val="FEF3C7"/>
+          </a:solidFill>
+          <a:ln w="19050">
+            <a:solidFill>
+              <a:srgbClr val="D97706"/>
+            </a:solidFill>
+          </a:ln>
+        </p:spPr>
+        <p:style>
+          <a:lnRef idx="1">
+            <a:schemeClr val="accent1"/>
+          </a:lnRef>
+          <a:fillRef idx="3">
+            <a:schemeClr val="accent1"/>
+          </a:fillRef>
+          <a:effectRef idx="2">
+            <a:schemeClr val="accent1"/>
+          </a:effectRef>
+          <a:fontRef idx="minor">
+            <a:schemeClr val="lt1"/>
+          </a:fontRef>
+        </p:style>
+        <p:txBody>
+          <a:bodyPr rtlCol="0" anchor="ctr"/>
+          <a:lstStyle/>
+          <a:p>
+            <a:pPr algn="ctr"/>
+          </a:p>
+        </p:txBody>
+      </p:sp>
+      <p:sp>
+        <p:nvSpPr>
+          <p:cNvPr id="7" name="TextBox 6"/>
+          <p:cNvSpPr txBox="1"/>
+          <p:nvPr/>
+        </p:nvSpPr>
+        <p:spPr>
+          <a:xfrm>
+            <a:off x="914400" y="1371600"/>
+            <a:ext cx="4937760" cy="4572000"/>
+          </a:xfrm>
+          <a:prstGeom prst="rect">
+            <a:avLst/>
+          </a:prstGeom>
+          <a:noFill/>
+        </p:spPr>
+        <p:txBody>
+          <a:bodyPr wrap="square">
+            <a:spAutoFit/>
+          </a:bodyPr>
+          <a:lstStyle/>
+          <a:p>
+            <a:pPr>
+              <a:spcAft>
+                <a:spcPts val="1000"/>
+              </a:spcAft>
+              <a:defRPr b="1" sz="1450">
+                <a:solidFill>
+                  <a:srgbClr val="D97706"/>
+                </a:solidFill>
+              </a:defRPr>
+            </a:pPr>
+            <a:r>
+              <a:t>📚 KTU High-Yield Questions (K2 Understand)</a:t>
+            </a:r>
+          </a:p>
+          <a:p>
+            <a:pPr>
+              <a:spcAft>
+                <a:spcPts val="700"/>
+              </a:spcAft>
+              <a:defRPr sz="1200">
+                <a:solidFill>
+                  <a:srgbClr val="0F172A"/>
+                </a:solidFill>
+              </a:defRPr>
+            </a:pPr>
+            <a:r>
+              <a:t>Q: Draw the IEEE 802.3 Ethernet frame format and explain the function of each field. Why is the minimum frame size 64 bytes and maximum 1518 bytes? (8 Marks)</a:t>
+            </a:r>
+          </a:p>
+          <a:p>
+            <a:pPr>
+              <a:spcAft>
+                <a:spcPts val="700"/>
+              </a:spcAft>
+              <a:defRPr sz="1200">
+                <a:solidFill>
+                  <a:srgbClr val="0F172A"/>
+                </a:solidFill>
+              </a:defRPr>
+            </a:pPr>
+            <a:r>
+              <a:t>Q: Compare Standard Ethernet, Fast Ethernet, Gigabit Ethernet, and 10 Gigabit Ethernet with respect to medium, coding, and transmission modes. (7 Marks)</a:t>
+            </a:r>
+          </a:p>
+        </p:txBody>
+      </p:sp>
+      <p:sp>
+        <p:nvSpPr>
+          <p:cNvPr id="8" name="Rounded Rectangle 7"/>
+          <p:cNvSpPr/>
+          <p:nvPr/>
+        </p:nvSpPr>
+        <p:spPr>
+          <a:xfrm>
+            <a:off x="6309360" y="1234440"/>
+            <a:ext cx="5212080" cy="4892040"/>
+          </a:xfrm>
+          <a:prstGeom prst="roundRect">
+            <a:avLst/>
+          </a:prstGeom>
+          <a:solidFill>
+            <a:srgbClr val="EEF2FF"/>
+          </a:solidFill>
+          <a:ln w="19050">
+            <a:solidFill>
+              <a:srgbClr val="0E7490"/>
+            </a:solidFill>
+          </a:ln>
+        </p:spPr>
+        <p:style>
+          <a:lnRef idx="1">
+            <a:schemeClr val="accent1"/>
+          </a:lnRef>
+          <a:fillRef idx="3">
+            <a:schemeClr val="accent1"/>
+          </a:fillRef>
+          <a:effectRef idx="2">
+            <a:schemeClr val="accent1"/>
+          </a:effectRef>
+          <a:fontRef idx="minor">
+            <a:schemeClr val="lt1"/>
+          </a:fontRef>
+        </p:style>
+        <p:txBody>
+          <a:bodyPr rtlCol="0" anchor="ctr"/>
+          <a:lstStyle/>
+          <a:p>
+            <a:pPr algn="ctr"/>
+          </a:p>
+        </p:txBody>
+      </p:sp>
+      <p:sp>
+        <p:nvSpPr>
+          <p:cNvPr id="9" name="TextBox 8"/>
+          <p:cNvSpPr txBox="1"/>
+          <p:nvPr/>
+        </p:nvSpPr>
+        <p:spPr>
+          <a:xfrm>
+            <a:off x="6492240" y="1371600"/>
+            <a:ext cx="4846320" cy="4572000"/>
+          </a:xfrm>
+          <a:prstGeom prst="rect">
+            <a:avLst/>
+          </a:prstGeom>
+          <a:noFill/>
+        </p:spPr>
+        <p:txBody>
+          <a:bodyPr wrap="square">
+            <a:spAutoFit/>
+          </a:bodyPr>
+          <a:lstStyle/>
+          <a:p>
+            <a:pPr>
+              <a:spcAft>
+                <a:spcPts val="1000"/>
+              </a:spcAft>
+              <a:defRPr b="1" sz="1450">
+                <a:solidFill>
+                  <a:srgbClr val="0E7490"/>
+                </a:solidFill>
+              </a:defRPr>
+            </a:pPr>
+            <a:r>
+              <a:t>💡 Critical Conceptual Takeaways</a:t>
             </a:r>
           </a:p>
           <a:p>
@@ -4226,14 +4900,14 @@
               <a:spcAft>
                 <a:spcPts val="600"/>
               </a:spcAft>
-              <a:defRPr sz="1250">
-                <a:solidFill>
-                  <a:srgbClr val="1E293B"/>
+              <a:defRPr sz="1200">
+                <a:solidFill>
+                  <a:srgbClr val="0F172A"/>
                 </a:solidFill>
               </a:defRPr>
             </a:pPr>
             <a:r>
-              <a:t>• Gigabit Ethernet (1000BASE-T): 1000 Mbps (1 Gbps), Cat 5e/6 UTP (all 4 pairs simultaneous bidirectional), 4D-PAM5 encoding</a:t>
+              <a:t>✔ Preamble and SFD synchronize bit timing; FCS trailer provides CRC-32 error detection.</a:t>
             </a:r>
           </a:p>
           <a:p>
@@ -4241,14 +4915,14 @@
               <a:spcAft>
                 <a:spcPts val="600"/>
               </a:spcAft>
-              <a:defRPr sz="1250">
-                <a:solidFill>
-                  <a:srgbClr val="1E293B"/>
+              <a:defRPr sz="1200">
+                <a:solidFill>
+                  <a:srgbClr val="0F172A"/>
                 </a:solidFill>
               </a:defRPr>
             </a:pPr>
             <a:r>
-              <a:t>• 1000BASE-SX / LX: 1 Gbps over Short-wavelength / Long-wavelength Optical Fiber</a:t>
+              <a:t>✔ 64-byte minimum frame ensures collision detection in 10/100 Mbps CSMA/CD networks.</a:t>
             </a:r>
           </a:p>
           <a:p>
@@ -4256,14 +4930,14 @@
               <a:spcAft>
                 <a:spcPts val="600"/>
               </a:spcAft>
-              <a:defRPr sz="1250">
-                <a:solidFill>
-                  <a:srgbClr val="1E293B"/>
+              <a:defRPr sz="1200">
+                <a:solidFill>
+                  <a:srgbClr val="0F172A"/>
                 </a:solidFill>
               </a:defRPr>
             </a:pPr>
             <a:r>
-              <a:t>• 10-Gigabit Ethernet (802.3ae): 10 Gbps, Optical Fiber &amp; Cat 6A UTP; Full-duplex only (CSMA/CD disabled!)</a:t>
+              <a:t>✔ 10GbE operates strictly in full-duplex mode over switches and fiber links.</a:t>
             </a:r>
           </a:p>
         </p:txBody>
@@ -4276,8 +4950,8 @@
         </p:nvSpPr>
         <p:spPr>
           <a:xfrm>
-            <a:off x="731520" y="6309360"/>
-            <a:ext cx="10789920" cy="365760"/>
+            <a:off x="731520" y="6327648"/>
+            <a:ext cx="10789920" cy="320040"/>
           </a:xfrm>
           <a:prstGeom prst="rect">
             <a:avLst/>
@@ -4299,6 +4973,41 @@
             </a:pPr>
             <a:r>
               <a:t>PCCST501 Computer Networks | KTU 2024 Scheme | Prof. Anju Markose | Assistant Professor, Dept. of CSE | VJCET</a:t>
+            </a:r>
+          </a:p>
+        </p:txBody>
+      </p:sp>
+      <p:sp>
+        <p:nvSpPr>
+          <p:cNvPr id="11" name="TextBox 10"/>
+          <p:cNvSpPr txBox="1"/>
+          <p:nvPr/>
+        </p:nvSpPr>
+        <p:spPr>
+          <a:xfrm>
+            <a:off x="6858000" y="6327648"/>
+            <a:ext cx="4572000" cy="320040"/>
+          </a:xfrm>
+          <a:prstGeom prst="rect">
+            <a:avLst/>
+          </a:prstGeom>
+          <a:noFill/>
+        </p:spPr>
+        <p:txBody>
+          <a:bodyPr wrap="none">
+            <a:spAutoFit/>
+          </a:bodyPr>
+          <a:lstStyle/>
+          <a:p>
+            <a:pPr algn="r">
+              <a:defRPr sz="950">
+                <a:solidFill>
+                  <a:srgbClr val="64748B"/>
+                </a:solidFill>
+              </a:defRPr>
+            </a:pPr>
+            <a:r>
+              <a:t>Dept. of CSE, VJCET</a:t>
             </a:r>
           </a:p>
         </p:txBody>
